--- a/OmniSign_3D_Phase2_Official_Template.pptx
+++ b/OmniSign_3D_Phase2_Official_Template.pptx
@@ -5,23 +5,23 @@
     <p:sldMasterId id="2147483648" r:id="rId1"/>
   </p:sldMasterIdLst>
   <p:sldIdLst>
-    <p:sldId id="256" r:id="rId7"/>
-    <p:sldId id="257" r:id="rId8"/>
-    <p:sldId id="258" r:id="rId9"/>
-    <p:sldId id="259" r:id="rId10"/>
-    <p:sldId id="260" r:id="rId11"/>
-    <p:sldId id="261" r:id="rId12"/>
-    <p:sldId id="262" r:id="rId13"/>
-    <p:sldId id="263" r:id="rId14"/>
-    <p:sldId id="264" r:id="rId15"/>
-    <p:sldId id="265" r:id="rId16"/>
-    <p:sldId id="266" r:id="rId17"/>
-    <p:sldId id="267" r:id="rId18"/>
-    <p:sldId id="268" r:id="rId19"/>
-    <p:sldId id="269" r:id="rId20"/>
-    <p:sldId id="270" r:id="rId21"/>
-    <p:sldId id="271" r:id="rId22"/>
-    <p:sldId id="272" r:id="rId23"/>
+    <p:sldId id="256" r:id="rId2"/>
+    <p:sldId id="257" r:id="rId3"/>
+    <p:sldId id="258" r:id="rId4"/>
+    <p:sldId id="259" r:id="rId5"/>
+    <p:sldId id="260" r:id="rId6"/>
+    <p:sldId id="261" r:id="rId7"/>
+    <p:sldId id="262" r:id="rId8"/>
+    <p:sldId id="263" r:id="rId9"/>
+    <p:sldId id="264" r:id="rId10"/>
+    <p:sldId id="265" r:id="rId11"/>
+    <p:sldId id="266" r:id="rId12"/>
+    <p:sldId id="267" r:id="rId13"/>
+    <p:sldId id="268" r:id="rId14"/>
+    <p:sldId id="269" r:id="rId15"/>
+    <p:sldId id="270" r:id="rId16"/>
+    <p:sldId id="271" r:id="rId17"/>
+    <p:sldId id="272" r:id="rId18"/>
   </p:sldIdLst>
   <p:sldSz cx="9144000" cy="6858000" type="screen4x3"/>
   <p:notesSz cx="6858000" cy="9144000"/>
@@ -120,6 +120,22 @@
       </a:defRPr>
     </a:lvl9pPr>
   </p:defaultTextStyle>
+  <p:extLst>
+    <p:ext uri="{EFAFB233-063F-42B5-8137-9DF3F51BA10A}">
+      <p15:sldGuideLst xmlns:p15="http://schemas.microsoft.com/office/powerpoint/2012/main">
+        <p15:guide id="1" orient="horz" pos="2160">
+          <p15:clr>
+            <a:srgbClr val="A4A3A4"/>
+          </p15:clr>
+        </p15:guide>
+        <p15:guide id="2" pos="2880">
+          <p15:clr>
+            <a:srgbClr val="A4A3A4"/>
+          </p15:clr>
+        </p15:guide>
+      </p15:sldGuideLst>
+    </p:ext>
+  </p:extLst>
 </p:presentation>
 </file>
 
@@ -161,10 +177,9 @@
           <a:lstStyle/>
           <a:p>
             <a:r>
-              <a:rPr lang="en-US" smtClean="0"/>
+              <a:rPr lang="en-US"/>
               <a:t>Click to edit Master title style</a:t>
             </a:r>
-            <a:endParaRPr lang="en-US"/>
           </a:p>
         </p:txBody>
       </p:sp>
@@ -280,10 +295,9 @@
           </a:lstStyle>
           <a:p>
             <a:r>
-              <a:rPr lang="en-US" smtClean="0"/>
+              <a:rPr lang="en-US"/>
               <a:t>Click to edit Master subtitle style</a:t>
             </a:r>
-            <a:endParaRPr lang="en-US"/>
           </a:p>
         </p:txBody>
       </p:sp>
@@ -304,7 +318,7 @@
           <a:p>
             <a:fld id="{5BCAD085-E8A6-8845-BD4E-CB4CCA059FC4}" type="datetimeFigureOut">
               <a:rPr lang="en-US" smtClean="0"/>
-              <a:t>1/27/13</a:t>
+              <a:t>10/21/2026</a:t>
             </a:fld>
             <a:endParaRPr lang="en-US"/>
           </a:p>
@@ -398,10 +412,9 @@
           <a:lstStyle/>
           <a:p>
             <a:r>
-              <a:rPr lang="en-US" smtClean="0"/>
+              <a:rPr lang="en-US"/>
               <a:t>Click to edit Master title style</a:t>
             </a:r>
-            <a:endParaRPr lang="en-US"/>
           </a:p>
         </p:txBody>
       </p:sp>
@@ -422,38 +435,37 @@
           <a:p>
             <a:pPr lvl="0"/>
             <a:r>
-              <a:rPr lang="en-US" smtClean="0"/>
+              <a:rPr lang="en-US"/>
               <a:t>Click to edit Master text styles</a:t>
             </a:r>
           </a:p>
           <a:p>
             <a:pPr lvl="1"/>
             <a:r>
-              <a:rPr lang="en-US" smtClean="0"/>
+              <a:rPr lang="en-US"/>
               <a:t>Second level</a:t>
             </a:r>
           </a:p>
           <a:p>
             <a:pPr lvl="2"/>
             <a:r>
-              <a:rPr lang="en-US" smtClean="0"/>
+              <a:rPr lang="en-US"/>
               <a:t>Third level</a:t>
             </a:r>
           </a:p>
           <a:p>
             <a:pPr lvl="3"/>
             <a:r>
-              <a:rPr lang="en-US" smtClean="0"/>
+              <a:rPr lang="en-US"/>
               <a:t>Fourth level</a:t>
             </a:r>
           </a:p>
           <a:p>
             <a:pPr lvl="4"/>
             <a:r>
-              <a:rPr lang="en-US" smtClean="0"/>
+              <a:rPr lang="en-US"/>
               <a:t>Fifth level</a:t>
             </a:r>
-            <a:endParaRPr lang="en-US"/>
           </a:p>
         </p:txBody>
       </p:sp>
@@ -474,7 +486,7 @@
           <a:p>
             <a:fld id="{5BCAD085-E8A6-8845-BD4E-CB4CCA059FC4}" type="datetimeFigureOut">
               <a:rPr lang="en-US" smtClean="0"/>
-              <a:t>1/27/13</a:t>
+              <a:t>10/21/2026</a:t>
             </a:fld>
             <a:endParaRPr lang="en-US"/>
           </a:p>
@@ -573,10 +585,9 @@
           <a:lstStyle/>
           <a:p>
             <a:r>
-              <a:rPr lang="en-US" smtClean="0"/>
+              <a:rPr lang="en-US"/>
               <a:t>Click to edit Master title style</a:t>
             </a:r>
-            <a:endParaRPr lang="en-US"/>
           </a:p>
         </p:txBody>
       </p:sp>
@@ -602,38 +613,37 @@
           <a:p>
             <a:pPr lvl="0"/>
             <a:r>
-              <a:rPr lang="en-US" smtClean="0"/>
+              <a:rPr lang="en-US"/>
               <a:t>Click to edit Master text styles</a:t>
             </a:r>
           </a:p>
           <a:p>
             <a:pPr lvl="1"/>
             <a:r>
-              <a:rPr lang="en-US" smtClean="0"/>
+              <a:rPr lang="en-US"/>
               <a:t>Second level</a:t>
             </a:r>
           </a:p>
           <a:p>
             <a:pPr lvl="2"/>
             <a:r>
-              <a:rPr lang="en-US" smtClean="0"/>
+              <a:rPr lang="en-US"/>
               <a:t>Third level</a:t>
             </a:r>
           </a:p>
           <a:p>
             <a:pPr lvl="3"/>
             <a:r>
-              <a:rPr lang="en-US" smtClean="0"/>
+              <a:rPr lang="en-US"/>
               <a:t>Fourth level</a:t>
             </a:r>
           </a:p>
           <a:p>
             <a:pPr lvl="4"/>
             <a:r>
-              <a:rPr lang="en-US" smtClean="0"/>
+              <a:rPr lang="en-US"/>
               <a:t>Fifth level</a:t>
             </a:r>
-            <a:endParaRPr lang="en-US"/>
           </a:p>
         </p:txBody>
       </p:sp>
@@ -654,7 +664,7 @@
           <a:p>
             <a:fld id="{5BCAD085-E8A6-8845-BD4E-CB4CCA059FC4}" type="datetimeFigureOut">
               <a:rPr lang="en-US" smtClean="0"/>
-              <a:t>1/27/13</a:t>
+              <a:t>10/21/2026</a:t>
             </a:fld>
             <a:endParaRPr lang="en-US"/>
           </a:p>
@@ -748,10 +758,9 @@
           <a:lstStyle/>
           <a:p>
             <a:r>
-              <a:rPr lang="en-US" smtClean="0"/>
+              <a:rPr lang="en-US"/>
               <a:t>Click to edit Master title style</a:t>
             </a:r>
-            <a:endParaRPr lang="en-US"/>
           </a:p>
         </p:txBody>
       </p:sp>
@@ -772,38 +781,37 @@
           <a:p>
             <a:pPr lvl="0"/>
             <a:r>
-              <a:rPr lang="en-US" smtClean="0"/>
+              <a:rPr lang="en-US"/>
               <a:t>Click to edit Master text styles</a:t>
             </a:r>
           </a:p>
           <a:p>
             <a:pPr lvl="1"/>
             <a:r>
-              <a:rPr lang="en-US" smtClean="0"/>
+              <a:rPr lang="en-US"/>
               <a:t>Second level</a:t>
             </a:r>
           </a:p>
           <a:p>
             <a:pPr lvl="2"/>
             <a:r>
-              <a:rPr lang="en-US" smtClean="0"/>
+              <a:rPr lang="en-US"/>
               <a:t>Third level</a:t>
             </a:r>
           </a:p>
           <a:p>
             <a:pPr lvl="3"/>
             <a:r>
-              <a:rPr lang="en-US" smtClean="0"/>
+              <a:rPr lang="en-US"/>
               <a:t>Fourth level</a:t>
             </a:r>
           </a:p>
           <a:p>
             <a:pPr lvl="4"/>
             <a:r>
-              <a:rPr lang="en-US" smtClean="0"/>
+              <a:rPr lang="en-US"/>
               <a:t>Fifth level</a:t>
             </a:r>
-            <a:endParaRPr lang="en-US"/>
           </a:p>
         </p:txBody>
       </p:sp>
@@ -824,7 +832,7 @@
           <a:p>
             <a:fld id="{5BCAD085-E8A6-8845-BD4E-CB4CCA059FC4}" type="datetimeFigureOut">
               <a:rPr lang="en-US" smtClean="0"/>
-              <a:t>1/27/13</a:t>
+              <a:t>10/21/2026</a:t>
             </a:fld>
             <a:endParaRPr lang="en-US"/>
           </a:p>
@@ -927,10 +935,9 @@
           </a:lstStyle>
           <a:p>
             <a:r>
-              <a:rPr lang="en-US" smtClean="0"/>
+              <a:rPr lang="en-US"/>
               <a:t>Click to edit Master title style</a:t>
             </a:r>
-            <a:endParaRPr lang="en-US"/>
           </a:p>
         </p:txBody>
       </p:sp>
@@ -1047,7 +1054,7 @@
           <a:p>
             <a:pPr lvl="0"/>
             <a:r>
-              <a:rPr lang="en-US" smtClean="0"/>
+              <a:rPr lang="en-US"/>
               <a:t>Click to edit Master text styles</a:t>
             </a:r>
           </a:p>
@@ -1070,7 +1077,7 @@
           <a:p>
             <a:fld id="{5BCAD085-E8A6-8845-BD4E-CB4CCA059FC4}" type="datetimeFigureOut">
               <a:rPr lang="en-US" smtClean="0"/>
-              <a:t>1/27/13</a:t>
+              <a:t>10/21/2026</a:t>
             </a:fld>
             <a:endParaRPr lang="en-US"/>
           </a:p>
@@ -1164,10 +1171,9 @@
           <a:lstStyle/>
           <a:p>
             <a:r>
-              <a:rPr lang="en-US" smtClean="0"/>
+              <a:rPr lang="en-US"/>
               <a:t>Click to edit Master title style</a:t>
             </a:r>
-            <a:endParaRPr lang="en-US"/>
           </a:p>
         </p:txBody>
       </p:sp>
@@ -1221,38 +1227,37 @@
           <a:p>
             <a:pPr lvl="0"/>
             <a:r>
-              <a:rPr lang="en-US" smtClean="0"/>
+              <a:rPr lang="en-US"/>
               <a:t>Click to edit Master text styles</a:t>
             </a:r>
           </a:p>
           <a:p>
             <a:pPr lvl="1"/>
             <a:r>
-              <a:rPr lang="en-US" smtClean="0"/>
+              <a:rPr lang="en-US"/>
               <a:t>Second level</a:t>
             </a:r>
           </a:p>
           <a:p>
             <a:pPr lvl="2"/>
             <a:r>
-              <a:rPr lang="en-US" smtClean="0"/>
+              <a:rPr lang="en-US"/>
               <a:t>Third level</a:t>
             </a:r>
           </a:p>
           <a:p>
             <a:pPr lvl="3"/>
             <a:r>
-              <a:rPr lang="en-US" smtClean="0"/>
+              <a:rPr lang="en-US"/>
               <a:t>Fourth level</a:t>
             </a:r>
           </a:p>
           <a:p>
             <a:pPr lvl="4"/>
             <a:r>
-              <a:rPr lang="en-US" smtClean="0"/>
+              <a:rPr lang="en-US"/>
               <a:t>Fifth level</a:t>
             </a:r>
-            <a:endParaRPr lang="en-US"/>
           </a:p>
         </p:txBody>
       </p:sp>
@@ -1306,38 +1311,37 @@
           <a:p>
             <a:pPr lvl="0"/>
             <a:r>
-              <a:rPr lang="en-US" smtClean="0"/>
+              <a:rPr lang="en-US"/>
               <a:t>Click to edit Master text styles</a:t>
             </a:r>
           </a:p>
           <a:p>
             <a:pPr lvl="1"/>
             <a:r>
-              <a:rPr lang="en-US" smtClean="0"/>
+              <a:rPr lang="en-US"/>
               <a:t>Second level</a:t>
             </a:r>
           </a:p>
           <a:p>
             <a:pPr lvl="2"/>
             <a:r>
-              <a:rPr lang="en-US" smtClean="0"/>
+              <a:rPr lang="en-US"/>
               <a:t>Third level</a:t>
             </a:r>
           </a:p>
           <a:p>
             <a:pPr lvl="3"/>
             <a:r>
-              <a:rPr lang="en-US" smtClean="0"/>
+              <a:rPr lang="en-US"/>
               <a:t>Fourth level</a:t>
             </a:r>
           </a:p>
           <a:p>
             <a:pPr lvl="4"/>
             <a:r>
-              <a:rPr lang="en-US" smtClean="0"/>
+              <a:rPr lang="en-US"/>
               <a:t>Fifth level</a:t>
             </a:r>
-            <a:endParaRPr lang="en-US"/>
           </a:p>
         </p:txBody>
       </p:sp>
@@ -1358,7 +1362,7 @@
           <a:p>
             <a:fld id="{5BCAD085-E8A6-8845-BD4E-CB4CCA059FC4}" type="datetimeFigureOut">
               <a:rPr lang="en-US" smtClean="0"/>
-              <a:t>1/27/13</a:t>
+              <a:t>10/21/2026</a:t>
             </a:fld>
             <a:endParaRPr lang="en-US"/>
           </a:p>
@@ -1456,10 +1460,9 @@
           </a:lstStyle>
           <a:p>
             <a:r>
-              <a:rPr lang="en-US" smtClean="0"/>
+              <a:rPr lang="en-US"/>
               <a:t>Click to edit Master title style</a:t>
             </a:r>
-            <a:endParaRPr lang="en-US"/>
           </a:p>
         </p:txBody>
       </p:sp>
@@ -1522,7 +1525,7 @@
           <a:p>
             <a:pPr lvl="0"/>
             <a:r>
-              <a:rPr lang="en-US" smtClean="0"/>
+              <a:rPr lang="en-US"/>
               <a:t>Click to edit Master text styles</a:t>
             </a:r>
           </a:p>
@@ -1578,38 +1581,37 @@
           <a:p>
             <a:pPr lvl="0"/>
             <a:r>
-              <a:rPr lang="en-US" smtClean="0"/>
+              <a:rPr lang="en-US"/>
               <a:t>Click to edit Master text styles</a:t>
             </a:r>
           </a:p>
           <a:p>
             <a:pPr lvl="1"/>
             <a:r>
-              <a:rPr lang="en-US" smtClean="0"/>
+              <a:rPr lang="en-US"/>
               <a:t>Second level</a:t>
             </a:r>
           </a:p>
           <a:p>
             <a:pPr lvl="2"/>
             <a:r>
-              <a:rPr lang="en-US" smtClean="0"/>
+              <a:rPr lang="en-US"/>
               <a:t>Third level</a:t>
             </a:r>
           </a:p>
           <a:p>
             <a:pPr lvl="3"/>
             <a:r>
-              <a:rPr lang="en-US" smtClean="0"/>
+              <a:rPr lang="en-US"/>
               <a:t>Fourth level</a:t>
             </a:r>
           </a:p>
           <a:p>
             <a:pPr lvl="4"/>
             <a:r>
-              <a:rPr lang="en-US" smtClean="0"/>
+              <a:rPr lang="en-US"/>
               <a:t>Fifth level</a:t>
             </a:r>
-            <a:endParaRPr lang="en-US"/>
           </a:p>
         </p:txBody>
       </p:sp>
@@ -1672,7 +1674,7 @@
           <a:p>
             <a:pPr lvl="0"/>
             <a:r>
-              <a:rPr lang="en-US" smtClean="0"/>
+              <a:rPr lang="en-US"/>
               <a:t>Click to edit Master text styles</a:t>
             </a:r>
           </a:p>
@@ -1728,38 +1730,37 @@
           <a:p>
             <a:pPr lvl="0"/>
             <a:r>
-              <a:rPr lang="en-US" smtClean="0"/>
+              <a:rPr lang="en-US"/>
               <a:t>Click to edit Master text styles</a:t>
             </a:r>
           </a:p>
           <a:p>
             <a:pPr lvl="1"/>
             <a:r>
-              <a:rPr lang="en-US" smtClean="0"/>
+              <a:rPr lang="en-US"/>
               <a:t>Second level</a:t>
             </a:r>
           </a:p>
           <a:p>
             <a:pPr lvl="2"/>
             <a:r>
-              <a:rPr lang="en-US" smtClean="0"/>
+              <a:rPr lang="en-US"/>
               <a:t>Third level</a:t>
             </a:r>
           </a:p>
           <a:p>
             <a:pPr lvl="3"/>
             <a:r>
-              <a:rPr lang="en-US" smtClean="0"/>
+              <a:rPr lang="en-US"/>
               <a:t>Fourth level</a:t>
             </a:r>
           </a:p>
           <a:p>
             <a:pPr lvl="4"/>
             <a:r>
-              <a:rPr lang="en-US" smtClean="0"/>
+              <a:rPr lang="en-US"/>
               <a:t>Fifth level</a:t>
             </a:r>
-            <a:endParaRPr lang="en-US"/>
           </a:p>
         </p:txBody>
       </p:sp>
@@ -1780,7 +1781,7 @@
           <a:p>
             <a:fld id="{5BCAD085-E8A6-8845-BD4E-CB4CCA059FC4}" type="datetimeFigureOut">
               <a:rPr lang="en-US" smtClean="0"/>
-              <a:t>1/27/13</a:t>
+              <a:t>10/21/2026</a:t>
             </a:fld>
             <a:endParaRPr lang="en-US"/>
           </a:p>
@@ -1874,10 +1875,9 @@
           <a:lstStyle/>
           <a:p>
             <a:r>
-              <a:rPr lang="en-US" smtClean="0"/>
+              <a:rPr lang="en-US"/>
               <a:t>Click to edit Master title style</a:t>
             </a:r>
-            <a:endParaRPr lang="en-US"/>
           </a:p>
         </p:txBody>
       </p:sp>
@@ -1898,7 +1898,7 @@
           <a:p>
             <a:fld id="{5BCAD085-E8A6-8845-BD4E-CB4CCA059FC4}" type="datetimeFigureOut">
               <a:rPr lang="en-US" smtClean="0"/>
-              <a:t>1/27/13</a:t>
+              <a:t>10/21/2026</a:t>
             </a:fld>
             <a:endParaRPr lang="en-US"/>
           </a:p>
@@ -1993,7 +1993,7 @@
           <a:p>
             <a:fld id="{5BCAD085-E8A6-8845-BD4E-CB4CCA059FC4}" type="datetimeFigureOut">
               <a:rPr lang="en-US" smtClean="0"/>
-              <a:t>1/27/13</a:t>
+              <a:t>10/21/2026</a:t>
             </a:fld>
             <a:endParaRPr lang="en-US"/>
           </a:p>
@@ -2096,10 +2096,9 @@
           </a:lstStyle>
           <a:p>
             <a:r>
-              <a:rPr lang="en-US" smtClean="0"/>
+              <a:rPr lang="en-US"/>
               <a:t>Click to edit Master title style</a:t>
             </a:r>
-            <a:endParaRPr lang="en-US"/>
           </a:p>
         </p:txBody>
       </p:sp>
@@ -2153,38 +2152,37 @@
           <a:p>
             <a:pPr lvl="0"/>
             <a:r>
-              <a:rPr lang="en-US" smtClean="0"/>
+              <a:rPr lang="en-US"/>
               <a:t>Click to edit Master text styles</a:t>
             </a:r>
           </a:p>
           <a:p>
             <a:pPr lvl="1"/>
             <a:r>
-              <a:rPr lang="en-US" smtClean="0"/>
+              <a:rPr lang="en-US"/>
               <a:t>Second level</a:t>
             </a:r>
           </a:p>
           <a:p>
             <a:pPr lvl="2"/>
             <a:r>
-              <a:rPr lang="en-US" smtClean="0"/>
+              <a:rPr lang="en-US"/>
               <a:t>Third level</a:t>
             </a:r>
           </a:p>
           <a:p>
             <a:pPr lvl="3"/>
             <a:r>
-              <a:rPr lang="en-US" smtClean="0"/>
+              <a:rPr lang="en-US"/>
               <a:t>Fourth level</a:t>
             </a:r>
           </a:p>
           <a:p>
             <a:pPr lvl="4"/>
             <a:r>
-              <a:rPr lang="en-US" smtClean="0"/>
+              <a:rPr lang="en-US"/>
               <a:t>Fifth level</a:t>
             </a:r>
-            <a:endParaRPr lang="en-US"/>
           </a:p>
         </p:txBody>
       </p:sp>
@@ -2247,7 +2245,7 @@
           <a:p>
             <a:pPr lvl="0"/>
             <a:r>
-              <a:rPr lang="en-US" smtClean="0"/>
+              <a:rPr lang="en-US"/>
               <a:t>Click to edit Master text styles</a:t>
             </a:r>
           </a:p>
@@ -2270,7 +2268,7 @@
           <a:p>
             <a:fld id="{5BCAD085-E8A6-8845-BD4E-CB4CCA059FC4}" type="datetimeFigureOut">
               <a:rPr lang="en-US" smtClean="0"/>
-              <a:t>1/27/13</a:t>
+              <a:t>10/21/2026</a:t>
             </a:fld>
             <a:endParaRPr lang="en-US"/>
           </a:p>
@@ -2373,10 +2371,9 @@
           </a:lstStyle>
           <a:p>
             <a:r>
-              <a:rPr lang="en-US" smtClean="0"/>
+              <a:rPr lang="en-US"/>
               <a:t>Click to edit Master title style</a:t>
             </a:r>
-            <a:endParaRPr lang="en-US"/>
           </a:p>
         </p:txBody>
       </p:sp>
@@ -2500,7 +2497,7 @@
           <a:p>
             <a:pPr lvl="0"/>
             <a:r>
-              <a:rPr lang="en-US" smtClean="0"/>
+              <a:rPr lang="en-US"/>
               <a:t>Click to edit Master text styles</a:t>
             </a:r>
           </a:p>
@@ -2523,7 +2520,7 @@
           <a:p>
             <a:fld id="{5BCAD085-E8A6-8845-BD4E-CB4CCA059FC4}" type="datetimeFigureOut">
               <a:rPr lang="en-US" smtClean="0"/>
-              <a:t>1/27/13</a:t>
+              <a:t>10/21/2026</a:t>
             </a:fld>
             <a:endParaRPr lang="en-US"/>
           </a:p>
@@ -2632,10 +2629,9 @@
           <a:lstStyle/>
           <a:p>
             <a:r>
-              <a:rPr lang="en-US" smtClean="0"/>
+              <a:rPr lang="en-US"/>
               <a:t>Click to edit Master title style</a:t>
             </a:r>
-            <a:endParaRPr lang="en-US"/>
           </a:p>
         </p:txBody>
       </p:sp>
@@ -2666,38 +2662,37 @@
           <a:p>
             <a:pPr lvl="0"/>
             <a:r>
-              <a:rPr lang="en-US" smtClean="0"/>
+              <a:rPr lang="en-US"/>
               <a:t>Click to edit Master text styles</a:t>
             </a:r>
           </a:p>
           <a:p>
             <a:pPr lvl="1"/>
             <a:r>
-              <a:rPr lang="en-US" smtClean="0"/>
+              <a:rPr lang="en-US"/>
               <a:t>Second level</a:t>
             </a:r>
           </a:p>
           <a:p>
             <a:pPr lvl="2"/>
             <a:r>
-              <a:rPr lang="en-US" smtClean="0"/>
+              <a:rPr lang="en-US"/>
               <a:t>Third level</a:t>
             </a:r>
           </a:p>
           <a:p>
             <a:pPr lvl="3"/>
             <a:r>
-              <a:rPr lang="en-US" smtClean="0"/>
+              <a:rPr lang="en-US"/>
               <a:t>Fourth level</a:t>
             </a:r>
           </a:p>
           <a:p>
             <a:pPr lvl="4"/>
             <a:r>
-              <a:rPr lang="en-US" smtClean="0"/>
+              <a:rPr lang="en-US"/>
               <a:t>Fifth level</a:t>
             </a:r>
-            <a:endParaRPr lang="en-US"/>
           </a:p>
         </p:txBody>
       </p:sp>
@@ -2736,7 +2731,7 @@
           <a:p>
             <a:fld id="{5BCAD085-E8A6-8845-BD4E-CB4CCA059FC4}" type="datetimeFigureOut">
               <a:rPr lang="en-US" smtClean="0"/>
-              <a:t>1/27/13</a:t>
+              <a:t>10/21/2026</a:t>
             </a:fld>
             <a:endParaRPr lang="en-US"/>
           </a:p>
@@ -3095,7 +3090,7 @@
 </file>
 
 <file path=ppt/slides/slide1.xml><?xml version="1.0" encoding="utf-8"?>
-<p:sld xmlns:a="http://schemas.openxmlformats.org/drawingml/2006/main" xmlns:p="http://schemas.openxmlformats.org/presentationml/2006/main" xmlns:r="http://schemas.openxmlformats.org/officeDocument/2006/relationships">
+<p:sld xmlns:a="http://schemas.openxmlformats.org/drawingml/2006/main" xmlns:r="http://schemas.openxmlformats.org/officeDocument/2006/relationships" xmlns:p="http://schemas.openxmlformats.org/presentationml/2006/main">
   <p:cSld>
     <p:bg>
       <p:bgPr>
@@ -3111,7 +3106,14 @@
         <p:cNvGrpSpPr/>
         <p:nvPr/>
       </p:nvGrpSpPr>
-      <p:grpSpPr/>
+      <p:grpSpPr>
+        <a:xfrm>
+          <a:off x="0" y="0"/>
+          <a:ext cx="0" cy="0"/>
+          <a:chOff x="0" y="0"/>
+          <a:chExt cx="0" cy="0"/>
+        </a:xfrm>
+      </p:grpSpPr>
       <p:sp>
         <p:nvSpPr>
           <p:cNvPr id="2" name="TextBox 1"/>
@@ -3157,7 +3159,7 @@
         <p:spPr>
           <a:xfrm>
             <a:off x="731520" y="1280160"/>
-            <a:ext cx="7680960" cy="5120640"/>
+            <a:ext cx="7680960" cy="2554545"/>
           </a:xfrm>
           <a:prstGeom prst="rect">
             <a:avLst/>
@@ -3176,7 +3178,7 @@
               </a:spcAft>
             </a:pPr>
             <a:r>
-              <a:rPr b="1" sz="1500">
+              <a:rPr sz="1500" b="1" dirty="0">
                 <a:solidFill>
                   <a:srgbClr val="000000"/>
                 </a:solidFill>
@@ -3185,13 +3187,22 @@
               <a:t>• Project Title: </a:t>
             </a:r>
             <a:r>
-              <a:rPr sz="1400">
+              <a:rPr sz="1400" dirty="0" err="1">
                 <a:solidFill>
                   <a:srgbClr val="1E1E1E"/>
                 </a:solidFill>
                 <a:latin typeface="Arial"/>
               </a:rPr>
-              <a:t>OmniSign 3D: Real-Time Bidirectional American Sign Language Translation &amp; 3D Kinematic Synthesis Studio</a:t>
+              <a:t>OmniSign</a:t>
+            </a:r>
+            <a:r>
+              <a:rPr sz="1400" dirty="0">
+                <a:solidFill>
+                  <a:srgbClr val="1E1E1E"/>
+                </a:solidFill>
+                <a:latin typeface="Arial"/>
+              </a:rPr>
+              <a:t> 3D: Real-Time Bidirectional American Sign Language Translation &amp; 3D Kinematic Synthesis Studio</a:t>
             </a:r>
           </a:p>
           <a:p>
@@ -3201,7 +3212,7 @@
               </a:spcAft>
             </a:pPr>
             <a:r>
-              <a:rPr b="1" sz="1500">
+              <a:rPr sz="1500" b="1" dirty="0">
                 <a:solidFill>
                   <a:srgbClr val="000000"/>
                 </a:solidFill>
@@ -3210,14 +3221,74 @@
               <a:t>• Student Name: </a:t>
             </a:r>
             <a:r>
-              <a:rPr sz="1400">
+              <a:rPr sz="1400" dirty="0">
                 <a:solidFill>
                   <a:srgbClr val="1E1E1E"/>
                 </a:solidFill>
                 <a:latin typeface="Arial"/>
               </a:rPr>
-              <a:t>Joel Joe Varghese</a:t>
-            </a:r>
+              <a:t>Joel </a:t>
+            </a:r>
+            <a:r>
+              <a:rPr lang="en-US" sz="1400" dirty="0">
+                <a:solidFill>
+                  <a:srgbClr val="1E1E1E"/>
+                </a:solidFill>
+                <a:latin typeface="Arial"/>
+              </a:rPr>
+              <a:t>Varghese joe, Jaden </a:t>
+            </a:r>
+            <a:r>
+              <a:rPr lang="en-US" sz="1400" dirty="0" err="1">
+                <a:solidFill>
+                  <a:srgbClr val="1E1E1E"/>
+                </a:solidFill>
+                <a:latin typeface="Arial"/>
+              </a:rPr>
+              <a:t>borges</a:t>
+            </a:r>
+            <a:r>
+              <a:rPr lang="en-US" sz="1400" dirty="0">
+                <a:solidFill>
+                  <a:srgbClr val="1E1E1E"/>
+                </a:solidFill>
+                <a:latin typeface="Arial"/>
+              </a:rPr>
+              <a:t> , </a:t>
+            </a:r>
+            <a:r>
+              <a:rPr lang="en-US" sz="1400" dirty="0" err="1">
+                <a:solidFill>
+                  <a:srgbClr val="1E1E1E"/>
+                </a:solidFill>
+                <a:latin typeface="Arial"/>
+              </a:rPr>
+              <a:t>kenn</a:t>
+            </a:r>
+            <a:r>
+              <a:rPr lang="en-US" sz="1400" dirty="0">
+                <a:solidFill>
+                  <a:srgbClr val="1E1E1E"/>
+                </a:solidFill>
+                <a:latin typeface="Arial"/>
+              </a:rPr>
+              <a:t> Machado ,Angel </a:t>
+            </a:r>
+            <a:r>
+              <a:rPr lang="en-US" sz="1400" dirty="0" err="1">
+                <a:solidFill>
+                  <a:srgbClr val="1E1E1E"/>
+                </a:solidFill>
+                <a:latin typeface="Arial"/>
+              </a:rPr>
+              <a:t>xavier</a:t>
+            </a:r>
+            <a:endParaRPr sz="1400" dirty="0">
+              <a:solidFill>
+                <a:srgbClr val="1E1E1E"/>
+              </a:solidFill>
+              <a:latin typeface="Arial"/>
+            </a:endParaRPr>
           </a:p>
           <a:p>
             <a:pPr>
@@ -3226,22 +3297,31 @@
               </a:spcAft>
             </a:pPr>
             <a:r>
-              <a:rPr b="1" sz="1500">
+              <a:rPr sz="1500" b="1" dirty="0">
                 <a:solidFill>
                   <a:srgbClr val="000000"/>
                 </a:solidFill>
                 <a:latin typeface="Arial"/>
               </a:rPr>
-              <a:t>• Roll No / Batch: </a:t>
-            </a:r>
-            <a:r>
-              <a:rPr sz="1400">
-                <a:solidFill>
-                  <a:srgbClr val="1E1E1E"/>
+              <a:t>• Roll No / Batch:</a:t>
+            </a:r>
+            <a:r>
+              <a:rPr sz="1500" dirty="0">
+                <a:solidFill>
+                  <a:srgbClr val="000000"/>
                 </a:solidFill>
                 <a:latin typeface="Arial"/>
               </a:rPr>
-              <a:t>CS-B / Batch 2022-2026</a:t>
+              <a:t> </a:t>
+            </a:r>
+            <a:r>
+              <a:rPr lang="en-US" sz="1500" dirty="0">
+                <a:solidFill>
+                  <a:srgbClr val="000000"/>
+                </a:solidFill>
+                <a:latin typeface="Arial"/>
+              </a:rPr>
+              <a:t>01,02,03,04    A1</a:t>
             </a:r>
           </a:p>
           <a:p>
@@ -3251,7 +3331,7 @@
               </a:spcAft>
             </a:pPr>
             <a:r>
-              <a:rPr b="1" sz="1500">
+              <a:rPr sz="1500" b="1" dirty="0">
                 <a:solidFill>
                   <a:srgbClr val="000000"/>
                 </a:solidFill>
@@ -3260,7 +3340,7 @@
               <a:t>• Course: ML Mini Project: </a:t>
             </a:r>
             <a:r>
-              <a:rPr sz="1400">
+              <a:rPr sz="1400" dirty="0">
                 <a:solidFill>
                   <a:srgbClr val="1E1E1E"/>
                 </a:solidFill>
@@ -3276,7 +3356,7 @@
               </a:spcAft>
             </a:pPr>
             <a:r>
-              <a:rPr b="1" sz="1500">
+              <a:rPr sz="1500" b="1" dirty="0">
                 <a:solidFill>
                   <a:srgbClr val="000000"/>
                 </a:solidFill>
@@ -3285,14 +3365,29 @@
               <a:t>• Guide Name: </a:t>
             </a:r>
             <a:r>
-              <a:rPr sz="1400">
+              <a:rPr sz="1400" dirty="0">
                 <a:solidFill>
                   <a:srgbClr val="1E1E1E"/>
                 </a:solidFill>
                 <a:latin typeface="Arial"/>
               </a:rPr>
-              <a:t>Dr. Faculty Mentor</a:t>
-            </a:r>
+              <a:t>Dr. </a:t>
+            </a:r>
+            <a:r>
+              <a:rPr lang="en-US" sz="1400" dirty="0">
+                <a:solidFill>
+                  <a:srgbClr val="1E1E1E"/>
+                </a:solidFill>
+                <a:latin typeface="Arial"/>
+              </a:rPr>
+              <a:t>Joanne Gomes</a:t>
+            </a:r>
+            <a:endParaRPr sz="1400" dirty="0">
+              <a:solidFill>
+                <a:srgbClr val="1E1E1E"/>
+              </a:solidFill>
+              <a:latin typeface="Arial"/>
+            </a:endParaRPr>
           </a:p>
           <a:p>
             <a:pPr>
@@ -3300,24 +3395,12 @@
                 <a:spcPts val="1200"/>
               </a:spcAft>
             </a:pPr>
-            <a:r>
-              <a:rPr b="1" sz="1500">
-                <a:solidFill>
-                  <a:srgbClr val="000000"/>
-                </a:solidFill>
-                <a:latin typeface="Arial"/>
-              </a:rPr>
-              <a:t>• Institute Name: </a:t>
-            </a:r>
-            <a:r>
-              <a:rPr sz="1400">
-                <a:solidFill>
-                  <a:srgbClr val="1E1E1E"/>
-                </a:solidFill>
-                <a:latin typeface="Arial"/>
-              </a:rPr>
-              <a:t>Department of Computer Science &amp; Engineering</a:t>
-            </a:r>
+            <a:endParaRPr sz="1400" dirty="0">
+              <a:solidFill>
+                <a:srgbClr val="1E1E1E"/>
+              </a:solidFill>
+              <a:latin typeface="Arial"/>
+            </a:endParaRPr>
           </a:p>
         </p:txBody>
       </p:sp>
@@ -3330,7 +3413,7 @@
 </file>
 
 <file path=ppt/slides/slide10.xml><?xml version="1.0" encoding="utf-8"?>
-<p:sld xmlns:a="http://schemas.openxmlformats.org/drawingml/2006/main" xmlns:p="http://schemas.openxmlformats.org/presentationml/2006/main" xmlns:r="http://schemas.openxmlformats.org/officeDocument/2006/relationships">
+<p:sld xmlns:a="http://schemas.openxmlformats.org/drawingml/2006/main" xmlns:r="http://schemas.openxmlformats.org/officeDocument/2006/relationships" xmlns:p="http://schemas.openxmlformats.org/presentationml/2006/main">
   <p:cSld>
     <p:bg>
       <p:bgPr>
@@ -3346,7 +3429,14 @@
         <p:cNvGrpSpPr/>
         <p:nvPr/>
       </p:nvGrpSpPr>
-      <p:grpSpPr/>
+      <p:grpSpPr>
+        <a:xfrm>
+          <a:off x="0" y="0"/>
+          <a:ext cx="0" cy="0"/>
+          <a:chOff x="0" y="0"/>
+          <a:chExt cx="0" cy="0"/>
+        </a:xfrm>
+      </p:grpSpPr>
       <p:sp>
         <p:nvSpPr>
           <p:cNvPr id="2" name="TextBox 1"/>
@@ -3409,7 +3499,7 @@
               <a:spcAft>
                 <a:spcPts val="300"/>
               </a:spcAft>
-              <a:defRPr b="1" sz="1500">
+              <a:defRPr sz="1500" b="1">
                 <a:latin typeface="Arial"/>
               </a:defRPr>
             </a:pPr>
@@ -3489,7 +3579,7 @@
               <a:spcAft>
                 <a:spcPts val="300"/>
               </a:spcAft>
-              <a:defRPr b="1" sz="1500">
+              <a:defRPr sz="1500" b="1">
                 <a:latin typeface="Arial"/>
               </a:defRPr>
             </a:pPr>
@@ -3572,7 +3662,7 @@
 </file>
 
 <file path=ppt/slides/slide11.xml><?xml version="1.0" encoding="utf-8"?>
-<p:sld xmlns:a="http://schemas.openxmlformats.org/drawingml/2006/main" xmlns:p="http://schemas.openxmlformats.org/presentationml/2006/main" xmlns:r="http://schemas.openxmlformats.org/officeDocument/2006/relationships">
+<p:sld xmlns:a="http://schemas.openxmlformats.org/drawingml/2006/main" xmlns:r="http://schemas.openxmlformats.org/officeDocument/2006/relationships" xmlns:p="http://schemas.openxmlformats.org/presentationml/2006/main">
   <p:cSld>
     <p:bg>
       <p:bgPr>
@@ -3588,7 +3678,14 @@
         <p:cNvGrpSpPr/>
         <p:nvPr/>
       </p:nvGrpSpPr>
-      <p:grpSpPr/>
+      <p:grpSpPr>
+        <a:xfrm>
+          <a:off x="0" y="0"/>
+          <a:ext cx="0" cy="0"/>
+          <a:chOff x="0" y="0"/>
+          <a:chExt cx="0" cy="0"/>
+        </a:xfrm>
+      </p:grpSpPr>
       <p:sp>
         <p:nvSpPr>
           <p:cNvPr id="2" name="TextBox 1"/>
@@ -3651,7 +3748,7 @@
               <a:spcAft>
                 <a:spcPts val="400"/>
               </a:spcAft>
-              <a:defRPr b="1" sz="1500">
+              <a:defRPr sz="1500" b="1">
                 <a:latin typeface="Arial"/>
               </a:defRPr>
             </a:pPr>
@@ -3671,7 +3768,7 @@
         </p:nvGraphicFramePr>
         <p:xfrm>
           <a:off x="731520" y="2011680"/>
-          <a:ext cx="7680960" cy="2103120"/>
+          <a:ext cx="7680960" cy="2121408"/>
         </p:xfrm>
         <a:graphic>
           <a:graphicData uri="http://schemas.openxmlformats.org/drawingml/2006/table">
@@ -3680,9 +3777,27 @@
                 <a:tableStyleId>{5C22544A-7EE6-4342-B048-85BDC9FD1C3A}</a:tableStyleId>
               </a:tblPr>
               <a:tblGrid>
-                <a:gridCol w="2377440"/>
-                <a:gridCol w="2651760"/>
-                <a:gridCol w="2651760"/>
+                <a:gridCol w="2377440">
+                  <a:extLst>
+                    <a:ext uri="{9D8B030D-6E8A-4147-A177-3AD203B41FA5}">
+                      <a16:colId xmlns:a16="http://schemas.microsoft.com/office/drawing/2014/main" val="20000"/>
+                    </a:ext>
+                  </a:extLst>
+                </a:gridCol>
+                <a:gridCol w="2651760">
+                  <a:extLst>
+                    <a:ext uri="{9D8B030D-6E8A-4147-A177-3AD203B41FA5}">
+                      <a16:colId xmlns:a16="http://schemas.microsoft.com/office/drawing/2014/main" val="20001"/>
+                    </a:ext>
+                  </a:extLst>
+                </a:gridCol>
+                <a:gridCol w="2651760">
+                  <a:extLst>
+                    <a:ext uri="{9D8B030D-6E8A-4147-A177-3AD203B41FA5}">
+                      <a16:colId xmlns:a16="http://schemas.microsoft.com/office/drawing/2014/main" val="20002"/>
+                    </a:ext>
+                  </a:extLst>
+                </a:gridCol>
               </a:tblGrid>
               <a:tr h="420624">
                 <a:tc>
@@ -3691,7 +3806,7 @@
                     <a:lstStyle/>
                     <a:p>
                       <a:pPr>
-                        <a:defRPr b="1" sz="1100">
+                        <a:defRPr sz="1100" b="1">
                           <a:solidFill>
                             <a:srgbClr val="000000"/>
                           </a:solidFill>
@@ -3715,7 +3830,7 @@
                     <a:lstStyle/>
                     <a:p>
                       <a:pPr>
-                        <a:defRPr b="1" sz="1100">
+                        <a:defRPr sz="1100" b="1">
                           <a:solidFill>
                             <a:srgbClr val="000000"/>
                           </a:solidFill>
@@ -3739,7 +3854,7 @@
                     <a:lstStyle/>
                     <a:p>
                       <a:pPr>
-                        <a:defRPr b="1" sz="1100">
+                        <a:defRPr sz="1100" b="1">
                           <a:solidFill>
                             <a:srgbClr val="000000"/>
                           </a:solidFill>
@@ -3757,6 +3872,11 @@
                     </a:solidFill>
                   </a:tcPr>
                 </a:tc>
+                <a:extLst>
+                  <a:ext uri="{0D108BD9-81ED-4DB2-BD59-A6C34878D82A}">
+                    <a16:rowId xmlns:a16="http://schemas.microsoft.com/office/drawing/2014/main" val="10000"/>
+                  </a:ext>
+                </a:extLst>
               </a:tr>
               <a:tr h="420624">
                 <a:tc>
@@ -3831,6 +3951,11 @@
                     </a:solidFill>
                   </a:tcPr>
                 </a:tc>
+                <a:extLst>
+                  <a:ext uri="{0D108BD9-81ED-4DB2-BD59-A6C34878D82A}">
+                    <a16:rowId xmlns:a16="http://schemas.microsoft.com/office/drawing/2014/main" val="10001"/>
+                  </a:ext>
+                </a:extLst>
               </a:tr>
               <a:tr h="420624">
                 <a:tc>
@@ -3905,6 +4030,11 @@
                     </a:solidFill>
                   </a:tcPr>
                 </a:tc>
+                <a:extLst>
+                  <a:ext uri="{0D108BD9-81ED-4DB2-BD59-A6C34878D82A}">
+                    <a16:rowId xmlns:a16="http://schemas.microsoft.com/office/drawing/2014/main" val="10002"/>
+                  </a:ext>
+                </a:extLst>
               </a:tr>
               <a:tr h="420624">
                 <a:tc>
@@ -3979,6 +4109,11 @@
                     </a:solidFill>
                   </a:tcPr>
                 </a:tc>
+                <a:extLst>
+                  <a:ext uri="{0D108BD9-81ED-4DB2-BD59-A6C34878D82A}">
+                    <a16:rowId xmlns:a16="http://schemas.microsoft.com/office/drawing/2014/main" val="10003"/>
+                  </a:ext>
+                </a:extLst>
               </a:tr>
               <a:tr h="420624">
                 <a:tc>
@@ -4053,6 +4188,11 @@
                     </a:solidFill>
                   </a:tcPr>
                 </a:tc>
+                <a:extLst>
+                  <a:ext uri="{0D108BD9-81ED-4DB2-BD59-A6C34878D82A}">
+                    <a16:rowId xmlns:a16="http://schemas.microsoft.com/office/drawing/2014/main" val="10004"/>
+                  </a:ext>
+                </a:extLst>
               </a:tr>
             </a:tbl>
           </a:graphicData>
@@ -4084,7 +4224,7 @@
               <a:spcAft>
                 <a:spcPts val="300"/>
               </a:spcAft>
-              <a:defRPr b="1" sz="1500">
+              <a:defRPr sz="1500" b="1">
                 <a:latin typeface="Arial"/>
               </a:defRPr>
             </a:pPr>
@@ -4151,7 +4291,7 @@
 </file>
 
 <file path=ppt/slides/slide12.xml><?xml version="1.0" encoding="utf-8"?>
-<p:sld xmlns:a="http://schemas.openxmlformats.org/drawingml/2006/main" xmlns:p="http://schemas.openxmlformats.org/presentationml/2006/main" xmlns:r="http://schemas.openxmlformats.org/officeDocument/2006/relationships">
+<p:sld xmlns:a="http://schemas.openxmlformats.org/drawingml/2006/main" xmlns:r="http://schemas.openxmlformats.org/officeDocument/2006/relationships" xmlns:p="http://schemas.openxmlformats.org/presentationml/2006/main">
   <p:cSld>
     <p:bg>
       <p:bgPr>
@@ -4167,7 +4307,14 @@
         <p:cNvGrpSpPr/>
         <p:nvPr/>
       </p:nvGrpSpPr>
-      <p:grpSpPr/>
+      <p:grpSpPr>
+        <a:xfrm>
+          <a:off x="0" y="0"/>
+          <a:ext cx="0" cy="0"/>
+          <a:chOff x="0" y="0"/>
+          <a:chExt cx="0" cy="0"/>
+        </a:xfrm>
+      </p:grpSpPr>
       <p:sp>
         <p:nvSpPr>
           <p:cNvPr id="2" name="TextBox 1"/>
@@ -4230,7 +4377,7 @@
               <a:spcAft>
                 <a:spcPts val="300"/>
               </a:spcAft>
-              <a:defRPr b="1" sz="1500">
+              <a:defRPr sz="1500" b="1">
                 <a:latin typeface="Arial"/>
               </a:defRPr>
             </a:pPr>
@@ -4278,7 +4425,7 @@
               <a:spcAft>
                 <a:spcPts val="300"/>
               </a:spcAft>
-              <a:defRPr b="1" sz="1500">
+              <a:defRPr sz="1500" b="1">
                 <a:latin typeface="Arial"/>
               </a:defRPr>
             </a:pPr>
@@ -4345,7 +4492,7 @@
 </file>
 
 <file path=ppt/slides/slide13.xml><?xml version="1.0" encoding="utf-8"?>
-<p:sld xmlns:a="http://schemas.openxmlformats.org/drawingml/2006/main" xmlns:p="http://schemas.openxmlformats.org/presentationml/2006/main" xmlns:r="http://schemas.openxmlformats.org/officeDocument/2006/relationships">
+<p:sld xmlns:a="http://schemas.openxmlformats.org/drawingml/2006/main" xmlns:r="http://schemas.openxmlformats.org/officeDocument/2006/relationships" xmlns:p="http://schemas.openxmlformats.org/presentationml/2006/main">
   <p:cSld>
     <p:bg>
       <p:bgPr>
@@ -4361,7 +4508,14 @@
         <p:cNvGrpSpPr/>
         <p:nvPr/>
       </p:nvGrpSpPr>
-      <p:grpSpPr/>
+      <p:grpSpPr>
+        <a:xfrm>
+          <a:off x="0" y="0"/>
+          <a:ext cx="0" cy="0"/>
+          <a:chOff x="0" y="0"/>
+          <a:chExt cx="0" cy="0"/>
+        </a:xfrm>
+      </p:grpSpPr>
       <p:sp>
         <p:nvSpPr>
           <p:cNvPr id="2" name="TextBox 1"/>
@@ -4424,7 +4578,7 @@
               <a:spcAft>
                 <a:spcPts val="300"/>
               </a:spcAft>
-              <a:defRPr b="1" sz="1500">
+              <a:defRPr sz="1500" b="1">
                 <a:latin typeface="Arial"/>
               </a:defRPr>
             </a:pPr>
@@ -4504,7 +4658,7 @@
               <a:spcAft>
                 <a:spcPts val="300"/>
               </a:spcAft>
-              <a:defRPr b="1" sz="1500">
+              <a:defRPr sz="1500" b="1">
                 <a:latin typeface="Arial"/>
               </a:defRPr>
             </a:pPr>
@@ -4571,7 +4725,7 @@
 </file>
 
 <file path=ppt/slides/slide14.xml><?xml version="1.0" encoding="utf-8"?>
-<p:sld xmlns:a="http://schemas.openxmlformats.org/drawingml/2006/main" xmlns:p="http://schemas.openxmlformats.org/presentationml/2006/main" xmlns:r="http://schemas.openxmlformats.org/officeDocument/2006/relationships">
+<p:sld xmlns:a="http://schemas.openxmlformats.org/drawingml/2006/main" xmlns:r="http://schemas.openxmlformats.org/officeDocument/2006/relationships" xmlns:p="http://schemas.openxmlformats.org/presentationml/2006/main">
   <p:cSld>
     <p:bg>
       <p:bgPr>
@@ -4587,7 +4741,14 @@
         <p:cNvGrpSpPr/>
         <p:nvPr/>
       </p:nvGrpSpPr>
-      <p:grpSpPr/>
+      <p:grpSpPr>
+        <a:xfrm>
+          <a:off x="0" y="0"/>
+          <a:ext cx="0" cy="0"/>
+          <a:chOff x="0" y="0"/>
+          <a:chExt cx="0" cy="0"/>
+        </a:xfrm>
+      </p:grpSpPr>
       <p:sp>
         <p:nvSpPr>
           <p:cNvPr id="2" name="TextBox 1"/>
@@ -4650,7 +4811,7 @@
               <a:spcAft>
                 <a:spcPts val="300"/>
               </a:spcAft>
-              <a:defRPr b="1" sz="1500">
+              <a:defRPr sz="1500" b="1">
                 <a:latin typeface="Arial"/>
               </a:defRPr>
             </a:pPr>
@@ -4682,7 +4843,7 @@
               <a:spcAft>
                 <a:spcPts val="300"/>
               </a:spcAft>
-              <a:defRPr b="1" sz="1500">
+              <a:defRPr sz="1500" b="1">
                 <a:latin typeface="Arial"/>
               </a:defRPr>
             </a:pPr>
@@ -4714,7 +4875,7 @@
               <a:spcAft>
                 <a:spcPts val="300"/>
               </a:spcAft>
-              <a:defRPr b="1" sz="1500">
+              <a:defRPr sz="1500" b="1">
                 <a:latin typeface="Arial"/>
               </a:defRPr>
             </a:pPr>
@@ -4765,7 +4926,7 @@
 </file>
 
 <file path=ppt/slides/slide15.xml><?xml version="1.0" encoding="utf-8"?>
-<p:sld xmlns:a="http://schemas.openxmlformats.org/drawingml/2006/main" xmlns:p="http://schemas.openxmlformats.org/presentationml/2006/main" xmlns:r="http://schemas.openxmlformats.org/officeDocument/2006/relationships">
+<p:sld xmlns:a="http://schemas.openxmlformats.org/drawingml/2006/main" xmlns:r="http://schemas.openxmlformats.org/officeDocument/2006/relationships" xmlns:p="http://schemas.openxmlformats.org/presentationml/2006/main">
   <p:cSld>
     <p:bg>
       <p:bgPr>
@@ -4781,7 +4942,14 @@
         <p:cNvGrpSpPr/>
         <p:nvPr/>
       </p:nvGrpSpPr>
-      <p:grpSpPr/>
+      <p:grpSpPr>
+        <a:xfrm>
+          <a:off x="0" y="0"/>
+          <a:ext cx="0" cy="0"/>
+          <a:chOff x="0" y="0"/>
+          <a:chExt cx="0" cy="0"/>
+        </a:xfrm>
+      </p:grpSpPr>
       <p:sp>
         <p:nvSpPr>
           <p:cNvPr id="2" name="TextBox 1"/>
@@ -4844,7 +5012,7 @@
               <a:spcAft>
                 <a:spcPts val="300"/>
               </a:spcAft>
-              <a:defRPr b="1" sz="1500">
+              <a:defRPr sz="1500" b="1">
                 <a:latin typeface="Arial"/>
               </a:defRPr>
             </a:pPr>
@@ -4924,7 +5092,7 @@
               <a:spcAft>
                 <a:spcPts val="300"/>
               </a:spcAft>
-              <a:defRPr b="1" sz="1500">
+              <a:defRPr sz="1500" b="1">
                 <a:latin typeface="Arial"/>
               </a:defRPr>
             </a:pPr>
@@ -4959,7 +5127,7 @@
 </file>
 
 <file path=ppt/slides/slide16.xml><?xml version="1.0" encoding="utf-8"?>
-<p:sld xmlns:a="http://schemas.openxmlformats.org/drawingml/2006/main" xmlns:p="http://schemas.openxmlformats.org/presentationml/2006/main" xmlns:r="http://schemas.openxmlformats.org/officeDocument/2006/relationships">
+<p:sld xmlns:a="http://schemas.openxmlformats.org/drawingml/2006/main" xmlns:r="http://schemas.openxmlformats.org/officeDocument/2006/relationships" xmlns:p="http://schemas.openxmlformats.org/presentationml/2006/main">
   <p:cSld>
     <p:bg>
       <p:bgPr>
@@ -4975,7 +5143,14 @@
         <p:cNvGrpSpPr/>
         <p:nvPr/>
       </p:nvGrpSpPr>
-      <p:grpSpPr/>
+      <p:grpSpPr>
+        <a:xfrm>
+          <a:off x="0" y="0"/>
+          <a:ext cx="0" cy="0"/>
+          <a:chOff x="0" y="0"/>
+          <a:chExt cx="0" cy="0"/>
+        </a:xfrm>
+      </p:grpSpPr>
       <p:sp>
         <p:nvSpPr>
           <p:cNvPr id="2" name="TextBox 1"/>
@@ -5038,7 +5213,7 @@
               <a:spcAft>
                 <a:spcPts val="200"/>
               </a:spcAft>
-              <a:defRPr b="1" sz="1350">
+              <a:defRPr sz="1350" b="1">
                 <a:latin typeface="Arial"/>
               </a:defRPr>
             </a:pPr>
@@ -5086,7 +5261,7 @@
               <a:spcAft>
                 <a:spcPts val="200"/>
               </a:spcAft>
-              <a:defRPr b="1" sz="1350">
+              <a:defRPr sz="1350" b="1">
                 <a:latin typeface="Arial"/>
               </a:defRPr>
             </a:pPr>
@@ -5150,7 +5325,7 @@
               <a:spcAft>
                 <a:spcPts val="200"/>
               </a:spcAft>
-              <a:defRPr b="1" sz="1350">
+              <a:defRPr sz="1350" b="1">
                 <a:latin typeface="Arial"/>
               </a:defRPr>
             </a:pPr>
@@ -5182,7 +5357,7 @@
               <a:spcAft>
                 <a:spcPts val="200"/>
               </a:spcAft>
-              <a:defRPr b="1" sz="1350">
+              <a:defRPr sz="1350" b="1">
                 <a:latin typeface="Arial"/>
               </a:defRPr>
             </a:pPr>
@@ -5214,7 +5389,7 @@
               <a:spcAft>
                 <a:spcPts val="200"/>
               </a:spcAft>
-              <a:defRPr b="1" sz="1350">
+              <a:defRPr sz="1350" b="1">
                 <a:latin typeface="Arial"/>
               </a:defRPr>
             </a:pPr>
@@ -5246,7 +5421,7 @@
               <a:spcAft>
                 <a:spcPts val="200"/>
               </a:spcAft>
-              <a:defRPr b="1" sz="1350">
+              <a:defRPr sz="1350" b="1">
                 <a:latin typeface="Arial"/>
               </a:defRPr>
             </a:pPr>
@@ -5281,7 +5456,7 @@
 </file>
 
 <file path=ppt/slides/slide17.xml><?xml version="1.0" encoding="utf-8"?>
-<p:sld xmlns:a="http://schemas.openxmlformats.org/drawingml/2006/main" xmlns:p="http://schemas.openxmlformats.org/presentationml/2006/main" xmlns:r="http://schemas.openxmlformats.org/officeDocument/2006/relationships">
+<p:sld xmlns:a="http://schemas.openxmlformats.org/drawingml/2006/main" xmlns:r="http://schemas.openxmlformats.org/officeDocument/2006/relationships" xmlns:p="http://schemas.openxmlformats.org/presentationml/2006/main">
   <p:cSld>
     <p:bg>
       <p:bgPr>
@@ -5297,7 +5472,14 @@
         <p:cNvGrpSpPr/>
         <p:nvPr/>
       </p:nvGrpSpPr>
-      <p:grpSpPr/>
+      <p:grpSpPr>
+        <a:xfrm>
+          <a:off x="0" y="0"/>
+          <a:ext cx="0" cy="0"/>
+          <a:chOff x="0" y="0"/>
+          <a:chExt cx="0" cy="0"/>
+        </a:xfrm>
+      </p:grpSpPr>
       <p:sp>
         <p:nvSpPr>
           <p:cNvPr id="2" name="TextBox 1"/>
@@ -5360,7 +5542,7 @@
               <a:spcAft>
                 <a:spcPts val="300"/>
               </a:spcAft>
-              <a:defRPr b="1" sz="1500">
+              <a:defRPr sz="1500" b="1">
                 <a:latin typeface="Arial"/>
               </a:defRPr>
             </a:pPr>
@@ -5392,7 +5574,7 @@
               <a:spcAft>
                 <a:spcPts val="300"/>
               </a:spcAft>
-              <a:defRPr b="1" sz="1500">
+              <a:defRPr sz="1500" b="1">
                 <a:latin typeface="Arial"/>
               </a:defRPr>
             </a:pPr>
@@ -5456,7 +5638,7 @@
               <a:spcAft>
                 <a:spcPts val="300"/>
               </a:spcAft>
-              <a:defRPr b="1" sz="1500">
+              <a:defRPr sz="1500" b="1">
                 <a:latin typeface="Arial"/>
               </a:defRPr>
             </a:pPr>
@@ -5488,7 +5670,7 @@
 </file>
 
 <file path=ppt/slides/slide2.xml><?xml version="1.0" encoding="utf-8"?>
-<p:sld xmlns:a="http://schemas.openxmlformats.org/drawingml/2006/main" xmlns:p="http://schemas.openxmlformats.org/presentationml/2006/main" xmlns:r="http://schemas.openxmlformats.org/officeDocument/2006/relationships">
+<p:sld xmlns:a="http://schemas.openxmlformats.org/drawingml/2006/main" xmlns:r="http://schemas.openxmlformats.org/officeDocument/2006/relationships" xmlns:p="http://schemas.openxmlformats.org/presentationml/2006/main">
   <p:cSld>
     <p:bg>
       <p:bgPr>
@@ -5504,7 +5686,14 @@
         <p:cNvGrpSpPr/>
         <p:nvPr/>
       </p:nvGrpSpPr>
-      <p:grpSpPr/>
+      <p:grpSpPr>
+        <a:xfrm>
+          <a:off x="0" y="0"/>
+          <a:ext cx="0" cy="0"/>
+          <a:chOff x="0" y="0"/>
+          <a:chExt cx="0" cy="0"/>
+        </a:xfrm>
+      </p:grpSpPr>
       <p:sp>
         <p:nvSpPr>
           <p:cNvPr id="2" name="TextBox 1"/>
@@ -5567,7 +5756,7 @@
               <a:spcAft>
                 <a:spcPts val="400"/>
               </a:spcAft>
-              <a:defRPr b="1" sz="1500">
+              <a:defRPr sz="1500" b="1">
                 <a:latin typeface="Arial"/>
               </a:defRPr>
             </a:pPr>
@@ -5631,7 +5820,7 @@
               <a:spcAft>
                 <a:spcPts val="400"/>
               </a:spcAft>
-              <a:defRPr b="1" sz="1500">
+              <a:defRPr sz="1500" b="1">
                 <a:latin typeface="Arial"/>
               </a:defRPr>
             </a:pPr>
@@ -5714,7 +5903,7 @@
 </file>
 
 <file path=ppt/slides/slide3.xml><?xml version="1.0" encoding="utf-8"?>
-<p:sld xmlns:a="http://schemas.openxmlformats.org/drawingml/2006/main" xmlns:p="http://schemas.openxmlformats.org/presentationml/2006/main" xmlns:r="http://schemas.openxmlformats.org/officeDocument/2006/relationships">
+<p:sld xmlns:a="http://schemas.openxmlformats.org/drawingml/2006/main" xmlns:r="http://schemas.openxmlformats.org/officeDocument/2006/relationships" xmlns:p="http://schemas.openxmlformats.org/presentationml/2006/main">
   <p:cSld>
     <p:bg>
       <p:bgPr>
@@ -5730,7 +5919,14 @@
         <p:cNvGrpSpPr/>
         <p:nvPr/>
       </p:nvGrpSpPr>
-      <p:grpSpPr/>
+      <p:grpSpPr>
+        <a:xfrm>
+          <a:off x="0" y="0"/>
+          <a:ext cx="0" cy="0"/>
+          <a:chOff x="0" y="0"/>
+          <a:chExt cx="0" cy="0"/>
+        </a:xfrm>
+      </p:grpSpPr>
       <p:sp>
         <p:nvSpPr>
           <p:cNvPr id="2" name="TextBox 1"/>
@@ -5793,7 +5989,7 @@
               <a:spcAft>
                 <a:spcPts val="300"/>
               </a:spcAft>
-              <a:defRPr b="1" sz="1500">
+              <a:defRPr sz="1500" b="1">
                 <a:latin typeface="Arial"/>
               </a:defRPr>
             </a:pPr>
@@ -5857,7 +6053,7 @@
               <a:spcAft>
                 <a:spcPts val="300"/>
               </a:spcAft>
-              <a:defRPr b="1" sz="1500">
+              <a:defRPr sz="1500" b="1">
                 <a:latin typeface="Arial"/>
               </a:defRPr>
             </a:pPr>
@@ -5905,7 +6101,7 @@
               <a:spcAft>
                 <a:spcPts val="300"/>
               </a:spcAft>
-              <a:defRPr b="1" sz="1500">
+              <a:defRPr sz="1500" b="1">
                 <a:latin typeface="Arial"/>
               </a:defRPr>
             </a:pPr>
@@ -5956,7 +6152,7 @@
 </file>
 
 <file path=ppt/slides/slide4.xml><?xml version="1.0" encoding="utf-8"?>
-<p:sld xmlns:a="http://schemas.openxmlformats.org/drawingml/2006/main" xmlns:p="http://schemas.openxmlformats.org/presentationml/2006/main" xmlns:r="http://schemas.openxmlformats.org/officeDocument/2006/relationships">
+<p:sld xmlns:a="http://schemas.openxmlformats.org/drawingml/2006/main" xmlns:r="http://schemas.openxmlformats.org/officeDocument/2006/relationships" xmlns:p="http://schemas.openxmlformats.org/presentationml/2006/main">
   <p:cSld>
     <p:bg>
       <p:bgPr>
@@ -5972,7 +6168,14 @@
         <p:cNvGrpSpPr/>
         <p:nvPr/>
       </p:nvGrpSpPr>
-      <p:grpSpPr/>
+      <p:grpSpPr>
+        <a:xfrm>
+          <a:off x="0" y="0"/>
+          <a:ext cx="0" cy="0"/>
+          <a:chOff x="0" y="0"/>
+          <a:chExt cx="0" cy="0"/>
+        </a:xfrm>
+      </p:grpSpPr>
       <p:sp>
         <p:nvSpPr>
           <p:cNvPr id="2" name="TextBox 1"/>
@@ -6035,7 +6238,7 @@
               <a:spcAft>
                 <a:spcPts val="800"/>
               </a:spcAft>
-              <a:defRPr i="1" sz="1400">
+              <a:defRPr sz="1400" i="1">
                 <a:solidFill>
                   <a:srgbClr val="505050"/>
                 </a:solidFill>
@@ -6051,7 +6254,7 @@
               <a:spcAft>
                 <a:spcPts val="300"/>
               </a:spcAft>
-              <a:defRPr b="1" sz="1500">
+              <a:defRPr sz="1500" b="1">
                 <a:latin typeface="Arial"/>
               </a:defRPr>
             </a:pPr>
@@ -6099,7 +6302,7 @@
               <a:spcAft>
                 <a:spcPts val="300"/>
               </a:spcAft>
-              <a:defRPr b="1" sz="1500">
+              <a:defRPr sz="1500" b="1">
                 <a:latin typeface="Arial"/>
               </a:defRPr>
             </a:pPr>
@@ -6147,7 +6350,7 @@
               <a:spcAft>
                 <a:spcPts val="300"/>
               </a:spcAft>
-              <a:defRPr b="1" sz="1500">
+              <a:defRPr sz="1500" b="1">
                 <a:latin typeface="Arial"/>
               </a:defRPr>
             </a:pPr>
@@ -6214,7 +6417,7 @@
 </file>
 
 <file path=ppt/slides/slide5.xml><?xml version="1.0" encoding="utf-8"?>
-<p:sld xmlns:a="http://schemas.openxmlformats.org/drawingml/2006/main" xmlns:p="http://schemas.openxmlformats.org/presentationml/2006/main" xmlns:r="http://schemas.openxmlformats.org/officeDocument/2006/relationships">
+<p:sld xmlns:a="http://schemas.openxmlformats.org/drawingml/2006/main" xmlns:r="http://schemas.openxmlformats.org/officeDocument/2006/relationships" xmlns:p="http://schemas.openxmlformats.org/presentationml/2006/main">
   <p:cSld>
     <p:bg>
       <p:bgPr>
@@ -6230,7 +6433,14 @@
         <p:cNvGrpSpPr/>
         <p:nvPr/>
       </p:nvGrpSpPr>
-      <p:grpSpPr/>
+      <p:grpSpPr>
+        <a:xfrm>
+          <a:off x="0" y="0"/>
+          <a:ext cx="0" cy="0"/>
+          <a:chOff x="0" y="0"/>
+          <a:chExt cx="0" cy="0"/>
+        </a:xfrm>
+      </p:grpSpPr>
       <p:sp>
         <p:nvSpPr>
           <p:cNvPr id="2" name="TextBox 1"/>
@@ -6293,7 +6503,7 @@
               <a:spcAft>
                 <a:spcPts val="300"/>
               </a:spcAft>
-              <a:defRPr b="1" sz="1500">
+              <a:defRPr sz="1500" b="1">
                 <a:latin typeface="Arial"/>
               </a:defRPr>
             </a:pPr>
@@ -6357,7 +6567,7 @@
               <a:spcAft>
                 <a:spcPts val="300"/>
               </a:spcAft>
-              <a:defRPr b="1" sz="1500">
+              <a:defRPr sz="1500" b="1">
                 <a:latin typeface="Arial"/>
               </a:defRPr>
             </a:pPr>
@@ -6405,7 +6615,7 @@
               <a:spcAft>
                 <a:spcPts val="300"/>
               </a:spcAft>
-              <a:defRPr b="1" sz="1500">
+              <a:defRPr sz="1500" b="1">
                 <a:latin typeface="Arial"/>
               </a:defRPr>
             </a:pPr>
@@ -6456,7 +6666,7 @@
 </file>
 
 <file path=ppt/slides/slide6.xml><?xml version="1.0" encoding="utf-8"?>
-<p:sld xmlns:a="http://schemas.openxmlformats.org/drawingml/2006/main" xmlns:p="http://schemas.openxmlformats.org/presentationml/2006/main" xmlns:r="http://schemas.openxmlformats.org/officeDocument/2006/relationships">
+<p:sld xmlns:a="http://schemas.openxmlformats.org/drawingml/2006/main" xmlns:r="http://schemas.openxmlformats.org/officeDocument/2006/relationships" xmlns:p="http://schemas.openxmlformats.org/presentationml/2006/main">
   <p:cSld>
     <p:bg>
       <p:bgPr>
@@ -6472,7 +6682,14 @@
         <p:cNvGrpSpPr/>
         <p:nvPr/>
       </p:nvGrpSpPr>
-      <p:grpSpPr/>
+      <p:grpSpPr>
+        <a:xfrm>
+          <a:off x="0" y="0"/>
+          <a:ext cx="0" cy="0"/>
+          <a:chOff x="0" y="0"/>
+          <a:chExt cx="0" cy="0"/>
+        </a:xfrm>
+      </p:grpSpPr>
       <p:sp>
         <p:nvSpPr>
           <p:cNvPr id="2" name="TextBox 1"/>
@@ -6535,7 +6752,7 @@
               <a:spcAft>
                 <a:spcPts val="300"/>
               </a:spcAft>
-              <a:defRPr b="1" sz="1500">
+              <a:defRPr sz="1500" b="1">
                 <a:latin typeface="Arial"/>
               </a:defRPr>
             </a:pPr>
@@ -6615,7 +6832,7 @@
               <a:spcAft>
                 <a:spcPts val="300"/>
               </a:spcAft>
-              <a:defRPr b="1" sz="1500">
+              <a:defRPr sz="1500" b="1">
                 <a:latin typeface="Arial"/>
               </a:defRPr>
             </a:pPr>
@@ -6698,7 +6915,7 @@
 </file>
 
 <file path=ppt/slides/slide7.xml><?xml version="1.0" encoding="utf-8"?>
-<p:sld xmlns:a="http://schemas.openxmlformats.org/drawingml/2006/main" xmlns:p="http://schemas.openxmlformats.org/presentationml/2006/main" xmlns:r="http://schemas.openxmlformats.org/officeDocument/2006/relationships">
+<p:sld xmlns:a="http://schemas.openxmlformats.org/drawingml/2006/main" xmlns:r="http://schemas.openxmlformats.org/officeDocument/2006/relationships" xmlns:p="http://schemas.openxmlformats.org/presentationml/2006/main">
   <p:cSld>
     <p:bg>
       <p:bgPr>
@@ -6714,7 +6931,14 @@
         <p:cNvGrpSpPr/>
         <p:nvPr/>
       </p:nvGrpSpPr>
-      <p:grpSpPr/>
+      <p:grpSpPr>
+        <a:xfrm>
+          <a:off x="0" y="0"/>
+          <a:ext cx="0" cy="0"/>
+          <a:chOff x="0" y="0"/>
+          <a:chExt cx="0" cy="0"/>
+        </a:xfrm>
+      </p:grpSpPr>
       <p:sp>
         <p:nvSpPr>
           <p:cNvPr id="2" name="TextBox 1"/>
@@ -6777,7 +7001,7 @@
               <a:spcAft>
                 <a:spcPts val="300"/>
               </a:spcAft>
-              <a:defRPr b="1" sz="1500">
+              <a:defRPr sz="1500" b="1">
                 <a:latin typeface="Arial"/>
               </a:defRPr>
             </a:pPr>
@@ -6873,7 +7097,7 @@
               <a:spcAft>
                 <a:spcPts val="300"/>
               </a:spcAft>
-              <a:defRPr b="1" sz="1500">
+              <a:defRPr sz="1500" b="1">
                 <a:latin typeface="Arial"/>
               </a:defRPr>
             </a:pPr>
@@ -6905,7 +7129,7 @@
               <a:spcAft>
                 <a:spcPts val="300"/>
               </a:spcAft>
-              <a:defRPr b="1" sz="1500">
+              <a:defRPr sz="1500" b="1">
                 <a:latin typeface="Arial"/>
               </a:defRPr>
             </a:pPr>
@@ -6940,7 +7164,7 @@
 </file>
 
 <file path=ppt/slides/slide8.xml><?xml version="1.0" encoding="utf-8"?>
-<p:sld xmlns:a="http://schemas.openxmlformats.org/drawingml/2006/main" xmlns:p="http://schemas.openxmlformats.org/presentationml/2006/main" xmlns:r="http://schemas.openxmlformats.org/officeDocument/2006/relationships">
+<p:sld xmlns:a="http://schemas.openxmlformats.org/drawingml/2006/main" xmlns:r="http://schemas.openxmlformats.org/officeDocument/2006/relationships" xmlns:p="http://schemas.openxmlformats.org/presentationml/2006/main">
   <p:cSld>
     <p:bg>
       <p:bgPr>
@@ -6956,7 +7180,14 @@
         <p:cNvGrpSpPr/>
         <p:nvPr/>
       </p:nvGrpSpPr>
-      <p:grpSpPr/>
+      <p:grpSpPr>
+        <a:xfrm>
+          <a:off x="0" y="0"/>
+          <a:ext cx="0" cy="0"/>
+          <a:chOff x="0" y="0"/>
+          <a:chExt cx="0" cy="0"/>
+        </a:xfrm>
+      </p:grpSpPr>
       <p:sp>
         <p:nvSpPr>
           <p:cNvPr id="2" name="TextBox 1"/>
@@ -7019,7 +7250,7 @@
               <a:spcAft>
                 <a:spcPts val="400"/>
               </a:spcAft>
-              <a:defRPr b="1" sz="1500">
+              <a:defRPr sz="1500" b="1">
                 <a:latin typeface="Arial"/>
               </a:defRPr>
             </a:pPr>
@@ -7048,13 +7279,55 @@
                 <a:tableStyleId>{5C22544A-7EE6-4342-B048-85BDC9FD1C3A}</a:tableStyleId>
               </a:tblPr>
               <a:tblGrid>
-                <a:gridCol w="2194560"/>
-                <a:gridCol w="914400"/>
-                <a:gridCol w="914400"/>
-                <a:gridCol w="914400"/>
-                <a:gridCol w="914400"/>
-                <a:gridCol w="914400"/>
-                <a:gridCol w="914400"/>
+                <a:gridCol w="2194560">
+                  <a:extLst>
+                    <a:ext uri="{9D8B030D-6E8A-4147-A177-3AD203B41FA5}">
+                      <a16:colId xmlns:a16="http://schemas.microsoft.com/office/drawing/2014/main" val="20000"/>
+                    </a:ext>
+                  </a:extLst>
+                </a:gridCol>
+                <a:gridCol w="914400">
+                  <a:extLst>
+                    <a:ext uri="{9D8B030D-6E8A-4147-A177-3AD203B41FA5}">
+                      <a16:colId xmlns:a16="http://schemas.microsoft.com/office/drawing/2014/main" val="20001"/>
+                    </a:ext>
+                  </a:extLst>
+                </a:gridCol>
+                <a:gridCol w="914400">
+                  <a:extLst>
+                    <a:ext uri="{9D8B030D-6E8A-4147-A177-3AD203B41FA5}">
+                      <a16:colId xmlns:a16="http://schemas.microsoft.com/office/drawing/2014/main" val="20002"/>
+                    </a:ext>
+                  </a:extLst>
+                </a:gridCol>
+                <a:gridCol w="914400">
+                  <a:extLst>
+                    <a:ext uri="{9D8B030D-6E8A-4147-A177-3AD203B41FA5}">
+                      <a16:colId xmlns:a16="http://schemas.microsoft.com/office/drawing/2014/main" val="20003"/>
+                    </a:ext>
+                  </a:extLst>
+                </a:gridCol>
+                <a:gridCol w="914400">
+                  <a:extLst>
+                    <a:ext uri="{9D8B030D-6E8A-4147-A177-3AD203B41FA5}">
+                      <a16:colId xmlns:a16="http://schemas.microsoft.com/office/drawing/2014/main" val="20004"/>
+                    </a:ext>
+                  </a:extLst>
+                </a:gridCol>
+                <a:gridCol w="914400">
+                  <a:extLst>
+                    <a:ext uri="{9D8B030D-6E8A-4147-A177-3AD203B41FA5}">
+                      <a16:colId xmlns:a16="http://schemas.microsoft.com/office/drawing/2014/main" val="20005"/>
+                    </a:ext>
+                  </a:extLst>
+                </a:gridCol>
+                <a:gridCol w="914400">
+                  <a:extLst>
+                    <a:ext uri="{9D8B030D-6E8A-4147-A177-3AD203B41FA5}">
+                      <a16:colId xmlns:a16="http://schemas.microsoft.com/office/drawing/2014/main" val="20006"/>
+                    </a:ext>
+                  </a:extLst>
+                </a:gridCol>
               </a:tblGrid>
               <a:tr h="420624">
                 <a:tc>
@@ -7063,7 +7336,7 @@
                     <a:lstStyle/>
                     <a:p>
                       <a:pPr>
-                        <a:defRPr b="1" sz="1100">
+                        <a:defRPr sz="1100" b="1">
                           <a:solidFill>
                             <a:srgbClr val="000000"/>
                           </a:solidFill>
@@ -7087,7 +7360,7 @@
                     <a:lstStyle/>
                     <a:p>
                       <a:pPr>
-                        <a:defRPr b="1" sz="1100">
+                        <a:defRPr sz="1100" b="1">
                           <a:solidFill>
                             <a:srgbClr val="000000"/>
                           </a:solidFill>
@@ -7111,7 +7384,7 @@
                     <a:lstStyle/>
                     <a:p>
                       <a:pPr>
-                        <a:defRPr b="1" sz="1100">
+                        <a:defRPr sz="1100" b="1">
                           <a:solidFill>
                             <a:srgbClr val="000000"/>
                           </a:solidFill>
@@ -7135,7 +7408,7 @@
                     <a:lstStyle/>
                     <a:p>
                       <a:pPr>
-                        <a:defRPr b="1" sz="1100">
+                        <a:defRPr sz="1100" b="1">
                           <a:solidFill>
                             <a:srgbClr val="000000"/>
                           </a:solidFill>
@@ -7159,7 +7432,7 @@
                     <a:lstStyle/>
                     <a:p>
                       <a:pPr>
-                        <a:defRPr b="1" sz="1100">
+                        <a:defRPr sz="1100" b="1">
                           <a:solidFill>
                             <a:srgbClr val="000000"/>
                           </a:solidFill>
@@ -7183,7 +7456,7 @@
                     <a:lstStyle/>
                     <a:p>
                       <a:pPr>
-                        <a:defRPr b="1" sz="1100">
+                        <a:defRPr sz="1100" b="1">
                           <a:solidFill>
                             <a:srgbClr val="000000"/>
                           </a:solidFill>
@@ -7207,7 +7480,7 @@
                     <a:lstStyle/>
                     <a:p>
                       <a:pPr>
-                        <a:defRPr b="1" sz="1100">
+                        <a:defRPr sz="1100" b="1">
                           <a:solidFill>
                             <a:srgbClr val="000000"/>
                           </a:solidFill>
@@ -7225,6 +7498,11 @@
                     </a:solidFill>
                   </a:tcPr>
                 </a:tc>
+                <a:extLst>
+                  <a:ext uri="{0D108BD9-81ED-4DB2-BD59-A6C34878D82A}">
+                    <a16:rowId xmlns:a16="http://schemas.microsoft.com/office/drawing/2014/main" val="10000"/>
+                  </a:ext>
+                </a:extLst>
               </a:tr>
               <a:tr h="420624">
                 <a:tc>
@@ -7395,6 +7673,11 @@
                     </a:solidFill>
                   </a:tcPr>
                 </a:tc>
+                <a:extLst>
+                  <a:ext uri="{0D108BD9-81ED-4DB2-BD59-A6C34878D82A}">
+                    <a16:rowId xmlns:a16="http://schemas.microsoft.com/office/drawing/2014/main" val="10001"/>
+                  </a:ext>
+                </a:extLst>
               </a:tr>
               <a:tr h="420624">
                 <a:tc>
@@ -7565,6 +7848,11 @@
                     </a:solidFill>
                   </a:tcPr>
                 </a:tc>
+                <a:extLst>
+                  <a:ext uri="{0D108BD9-81ED-4DB2-BD59-A6C34878D82A}">
+                    <a16:rowId xmlns:a16="http://schemas.microsoft.com/office/drawing/2014/main" val="10002"/>
+                  </a:ext>
+                </a:extLst>
               </a:tr>
               <a:tr h="420624">
                 <a:tc>
@@ -7735,6 +8023,11 @@
                     </a:solidFill>
                   </a:tcPr>
                 </a:tc>
+                <a:extLst>
+                  <a:ext uri="{0D108BD9-81ED-4DB2-BD59-A6C34878D82A}">
+                    <a16:rowId xmlns:a16="http://schemas.microsoft.com/office/drawing/2014/main" val="10003"/>
+                  </a:ext>
+                </a:extLst>
               </a:tr>
               <a:tr h="420624">
                 <a:tc>
@@ -7905,6 +8198,11 @@
                     </a:solidFill>
                   </a:tcPr>
                 </a:tc>
+                <a:extLst>
+                  <a:ext uri="{0D108BD9-81ED-4DB2-BD59-A6C34878D82A}">
+                    <a16:rowId xmlns:a16="http://schemas.microsoft.com/office/drawing/2014/main" val="10004"/>
+                  </a:ext>
+                </a:extLst>
               </a:tr>
             </a:tbl>
           </a:graphicData>
@@ -7936,7 +8234,7 @@
               <a:spcAft>
                 <a:spcPts val="300"/>
               </a:spcAft>
-              <a:defRPr b="1" sz="1500">
+              <a:defRPr sz="1500" b="1">
                 <a:latin typeface="Arial"/>
               </a:defRPr>
             </a:pPr>
@@ -8019,7 +8317,7 @@
 </file>
 
 <file path=ppt/slides/slide9.xml><?xml version="1.0" encoding="utf-8"?>
-<p:sld xmlns:a="http://schemas.openxmlformats.org/drawingml/2006/main" xmlns:p="http://schemas.openxmlformats.org/presentationml/2006/main" xmlns:r="http://schemas.openxmlformats.org/officeDocument/2006/relationships">
+<p:sld xmlns:a="http://schemas.openxmlformats.org/drawingml/2006/main" xmlns:r="http://schemas.openxmlformats.org/officeDocument/2006/relationships" xmlns:p="http://schemas.openxmlformats.org/presentationml/2006/main">
   <p:cSld>
     <p:bg>
       <p:bgPr>
@@ -8035,7 +8333,14 @@
         <p:cNvGrpSpPr/>
         <p:nvPr/>
       </p:nvGrpSpPr>
-      <p:grpSpPr/>
+      <p:grpSpPr>
+        <a:xfrm>
+          <a:off x="0" y="0"/>
+          <a:ext cx="0" cy="0"/>
+          <a:chOff x="0" y="0"/>
+          <a:chExt cx="0" cy="0"/>
+        </a:xfrm>
+      </p:grpSpPr>
       <p:sp>
         <p:nvSpPr>
           <p:cNvPr id="2" name="TextBox 1"/>
@@ -8098,7 +8403,7 @@
               <a:spcAft>
                 <a:spcPts val="300"/>
               </a:spcAft>
-              <a:defRPr b="1" sz="1500">
+              <a:defRPr sz="1500" b="1">
                 <a:latin typeface="Arial"/>
               </a:defRPr>
             </a:pPr>
@@ -8130,7 +8435,7 @@
               <a:spcAft>
                 <a:spcPts val="300"/>
               </a:spcAft>
-              <a:defRPr b="1" sz="1500">
+              <a:defRPr sz="1500" b="1">
                 <a:latin typeface="Arial"/>
               </a:defRPr>
             </a:pPr>
